--- a/examples/ppt/transitions/transitions-modern.pptx
+++ b/examples/ppt/transitions/transitions-modern.pptx
@@ -5,25 +5,25 @@
     <p:sldMasterId xmlns:r="http://schemas.openxmlformats.org/officeDocument/2006/relationships" id="2147483648" r:id="rId1"/>
   </p:sldMasterIdLst>
   <p:sldIdLst>
-    <p:sldId id="256" r:id="R3f9000ee32d74fbc"/>
-    <p:sldId id="257" r:id="R8a351eaf0b7242e4"/>
-    <p:sldId id="258" r:id="Rcce390b21f7b4306"/>
-    <p:sldId id="259" r:id="R3cad175854b94148"/>
-    <p:sldId id="260" r:id="R2fca1d12d76c4b85"/>
-    <p:sldId id="261" r:id="R329e5ba4025f47de"/>
-    <p:sldId id="262" r:id="Rf3868dbad46a4dd3"/>
-    <p:sldId id="263" r:id="R25e5b444812f4bd6"/>
-    <p:sldId id="264" r:id="Re86f52d8c5c445ea"/>
-    <p:sldId id="265" r:id="Rdf9cf77e8d5c4875"/>
-    <p:sldId id="266" r:id="Rc61323b05ec245a4"/>
-    <p:sldId id="267" r:id="Rf8269eaff3ac471a"/>
-    <p:sldId id="268" r:id="R09b0aefe9dea4f3e"/>
-    <p:sldId id="269" r:id="R68661bdf6d374373"/>
-    <p:sldId id="270" r:id="R27bbe97f4943494d"/>
-    <p:sldId id="271" r:id="Re4e24fc948bb4a24"/>
-    <p:sldId id="272" r:id="R32da6c2ea110407c"/>
-    <p:sldId id="273" r:id="Rdf987c270d714832"/>
-    <p:sldId id="274" r:id="R75f9ff9a90854ccc"/>
+    <p:sldId id="256" r:id="Rcbeb1345e6ae45b3"/>
+    <p:sldId id="257" r:id="R310de5851eca4bae"/>
+    <p:sldId id="258" r:id="R236d45f7ea204409"/>
+    <p:sldId id="259" r:id="R8fa2709c2a434c8e"/>
+    <p:sldId id="260" r:id="R143dc4d28f224b69"/>
+    <p:sldId id="261" r:id="R290bdafbb0e24011"/>
+    <p:sldId id="262" r:id="R400683665f6d4226"/>
+    <p:sldId id="263" r:id="Rf213812df94b48b4"/>
+    <p:sldId id="264" r:id="R3af0d2309b584614"/>
+    <p:sldId id="265" r:id="Rabb0f315657d494f"/>
+    <p:sldId id="266" r:id="Rdd21b994108b4b4a"/>
+    <p:sldId id="267" r:id="R5dabe8ddb7b843de"/>
+    <p:sldId id="268" r:id="R78d0dabef640475b"/>
+    <p:sldId id="269" r:id="Rdb8ae4b9289e48ce"/>
+    <p:sldId id="270" r:id="Rf3074503b1354e10"/>
+    <p:sldId id="271" r:id="Ree85f68fd6df45bc"/>
+    <p:sldId id="272" r:id="R26228eb7af5a4ed5"/>
+    <p:sldId id="273" r:id="R6beee7ff2c10483a"/>
+    <p:sldId id="274" r:id="R0c31b885a14f42ca"/>
   </p:sldIdLst>
   <p:sldSz cx="12192000" cy="6858000"/>
   <p:notesSz cx="6858000" cy="9144000"/>
@@ -818,7 +818,7 @@
   <mc:AlternateContent>
     <mc:Choice Requires="p15">
       <p:transition xmlns:p15="http://schemas.microsoft.com/office/powerpoint/2012/main">
-        <p15:prstTrans prst="wind" invX="1" invY="1"/>
+        <p15:prstTrans prst="wind" invX="1"/>
       </p:transition>
     </mc:Choice>
     <mc:Fallback>
@@ -905,7 +905,7 @@
   <mc:AlternateContent>
     <mc:Choice Requires="p15">
       <p:transition xmlns:p15="http://schemas.microsoft.com/office/powerpoint/2012/main">
-        <p15:prstTrans prst="peelOff" invX="1" invY="1"/>
+        <p15:prstTrans prst="peelOff" invX="1"/>
       </p:transition>
     </mc:Choice>
     <mc:Fallback>
@@ -992,7 +992,7 @@
   <mc:AlternateContent>
     <mc:Choice Requires="p15">
       <p:transition xmlns:p15="http://schemas.microsoft.com/office/powerpoint/2012/main">
-        <p15:prstTrans prst="pageCurlDouble" invX="1" invY="1"/>
+        <p15:prstTrans prst="pageCurlDouble" invX="1"/>
       </p:transition>
     </mc:Choice>
     <mc:Fallback>
@@ -1079,7 +1079,7 @@
   <mc:AlternateContent>
     <mc:Choice Requires="p15">
       <p:transition xmlns:p15="http://schemas.microsoft.com/office/powerpoint/2012/main">
-        <p15:prstTrans prst="airplane" invX="1" invY="1"/>
+        <p15:prstTrans prst="airplane" invX="1"/>
       </p:transition>
     </mc:Choice>
     <mc:Fallback>
@@ -1166,7 +1166,7 @@
   <mc:AlternateContent>
     <mc:Choice Requires="p15">
       <p:transition xmlns:p15="http://schemas.microsoft.com/office/powerpoint/2012/main">
-        <p15:prstTrans prst="origami" invX="1" invY="1"/>
+        <p15:prstTrans prst="origami" invX="1"/>
       </p:transition>
     </mc:Choice>
     <mc:Fallback>
@@ -1253,7 +1253,7 @@
   <mc:AlternateContent>
     <mc:Choice Requires="p15">
       <p:transition xmlns:p15="http://schemas.microsoft.com/office/powerpoint/2012/main">
-        <p15:prstTrans prst="fallOver" invX="1" invY="1"/>
+        <p15:prstTrans prst="fallOver" invX="1"/>
       </p:transition>
     </mc:Choice>
     <mc:Fallback>
